--- a/LabBook_40.pptx
+++ b/LabBook_40.pptx
@@ -13305,6 +13305,36 @@
           <a:xfrm>
             <a:off x="2316872" y="1418373"/>
             <a:ext cx="3252204" cy="3399078"/>
+          </a:xfrm>
+          <a:prstGeom prst="rect">
+            <a:avLst/>
+          </a:prstGeom>
+        </p:spPr>
+      </p:pic>
+      <p:pic>
+        <p:nvPicPr>
+          <p:cNvPr id="15" name="Imagen 14">
+            <a:extLst>
+              <a:ext uri="{FF2B5EF4-FFF2-40B4-BE49-F238E27FC236}">
+                <a16:creationId xmlns:a16="http://schemas.microsoft.com/office/drawing/2014/main" id="{EBCB8C6B-B1F1-7ADA-43FC-704509468972}"/>
+              </a:ext>
+            </a:extLst>
+          </p:cNvPr>
+          <p:cNvPicPr>
+            <a:picLocks noChangeAspect="1"/>
+          </p:cNvPicPr>
+          <p:nvPr/>
+        </p:nvPicPr>
+        <p:blipFill>
+          <a:blip r:embed="rId5"/>
+          <a:stretch>
+            <a:fillRect/>
+          </a:stretch>
+        </p:blipFill>
+        <p:spPr>
+          <a:xfrm>
+            <a:off x="6814145" y="1319849"/>
+            <a:ext cx="4640436" cy="3503075"/>
           </a:xfrm>
           <a:prstGeom prst="rect">
             <a:avLst/>
@@ -17122,14 +17152,14 @@
 <file path=customXml/itemProps3.xml><?xml version="1.0" encoding="utf-8"?>
 <ds:datastoreItem xmlns:ds="http://schemas.openxmlformats.org/officeDocument/2006/customXml" ds:itemID="{A421C088-6FB8-4AB1-AD43-D32F46F48688}">
   <ds:schemaRefs>
+    <ds:schemaRef ds:uri="628a1654-b00c-40ae-8883-19ab0b2b6570"/>
+    <ds:schemaRef ds:uri="http://purl.org/dc/elements/1.1/"/>
+    <ds:schemaRef ds:uri="http://purl.org/dc/dcmitype/"/>
+    <ds:schemaRef ds:uri="http://schemas.microsoft.com/office/infopath/2007/PartnerControls"/>
+    <ds:schemaRef ds:uri="http://schemas.microsoft.com/office/2006/documentManagement/types"/>
+    <ds:schemaRef ds:uri="http://www.w3.org/XML/1998/namespace"/>
     <ds:schemaRef ds:uri="http://schemas.openxmlformats.org/package/2006/metadata/core-properties"/>
-    <ds:schemaRef ds:uri="http://www.w3.org/XML/1998/namespace"/>
-    <ds:schemaRef ds:uri="http://purl.org/dc/dcmitype/"/>
-    <ds:schemaRef ds:uri="http://purl.org/dc/elements/1.1/"/>
     <ds:schemaRef ds:uri="c60c4169-c067-4dfc-b212-3b05d96a7ecd"/>
-    <ds:schemaRef ds:uri="http://schemas.microsoft.com/office/2006/documentManagement/types"/>
-    <ds:schemaRef ds:uri="628a1654-b00c-40ae-8883-19ab0b2b6570"/>
-    <ds:schemaRef ds:uri="http://schemas.microsoft.com/office/infopath/2007/PartnerControls"/>
     <ds:schemaRef ds:uri="http://schemas.microsoft.com/office/2006/metadata/properties"/>
     <ds:schemaRef ds:uri="http://purl.org/dc/terms/"/>
   </ds:schemaRefs>

--- a/LabBook_40.pptx
+++ b/LabBook_40.pptx
@@ -5,10 +5,10 @@
     <p:sldMasterId id="2147483648" r:id="rId4"/>
   </p:sldMasterIdLst>
   <p:notesMasterIdLst>
-    <p:notesMasterId r:id="rId29"/>
+    <p:notesMasterId r:id="rId30"/>
   </p:notesMasterIdLst>
   <p:handoutMasterIdLst>
-    <p:handoutMasterId r:id="rId30"/>
+    <p:handoutMasterId r:id="rId31"/>
   </p:handoutMasterIdLst>
   <p:sldIdLst>
     <p:sldId id="256" r:id="rId5"/>
@@ -32,9 +32,10 @@
     <p:sldId id="304" r:id="rId23"/>
     <p:sldId id="305" r:id="rId24"/>
     <p:sldId id="306" r:id="rId25"/>
-    <p:sldId id="307" r:id="rId26"/>
-    <p:sldId id="308" r:id="rId27"/>
-    <p:sldId id="288" r:id="rId28"/>
+    <p:sldId id="308" r:id="rId26"/>
+    <p:sldId id="312" r:id="rId27"/>
+    <p:sldId id="307" r:id="rId28"/>
+    <p:sldId id="288" r:id="rId29"/>
   </p:sldIdLst>
   <p:sldSz cx="12192000" cy="6858000"/>
   <p:notesSz cx="12192000" cy="6858000"/>
@@ -1973,7 +1974,7 @@
         <p:cNvPr id="1" name="">
           <a:extLst>
             <a:ext uri="{FF2B5EF4-FFF2-40B4-BE49-F238E27FC236}">
-              <a16:creationId xmlns:a16="http://schemas.microsoft.com/office/drawing/2014/main" id="{593FEA56-BC14-5FA8-97A0-FB44222279FF}"/>
+              <a16:creationId xmlns:a16="http://schemas.microsoft.com/office/drawing/2014/main" id="{DF68D2E6-0237-D873-7C3A-D798C24D8CBB}"/>
             </a:ext>
           </a:extLst>
         </p:cNvPr>
@@ -1993,7 +1994,7 @@
           <p:cNvPr id="2" name="Marcador de imagen de diapositiva 1">
             <a:extLst>
               <a:ext uri="{FF2B5EF4-FFF2-40B4-BE49-F238E27FC236}">
-                <a16:creationId xmlns:a16="http://schemas.microsoft.com/office/drawing/2014/main" id="{26A26B9B-1789-4EA3-154C-58E5C835C0DD}"/>
+                <a16:creationId xmlns:a16="http://schemas.microsoft.com/office/drawing/2014/main" id="{2A1D92CB-0F7C-4C4E-97B1-B4EEEED4EDC3}"/>
               </a:ext>
             </a:extLst>
           </p:cNvPr>
@@ -2011,7 +2012,7 @@
           <p:cNvPr id="3" name="Marcador de notas 2">
             <a:extLst>
               <a:ext uri="{FF2B5EF4-FFF2-40B4-BE49-F238E27FC236}">
-                <a16:creationId xmlns:a16="http://schemas.microsoft.com/office/drawing/2014/main" id="{9A4171A3-BF58-8FBE-62F6-01E3EA34B40F}"/>
+                <a16:creationId xmlns:a16="http://schemas.microsoft.com/office/drawing/2014/main" id="{54C66880-7959-6B40-7145-D720E5070843}"/>
               </a:ext>
             </a:extLst>
           </p:cNvPr>
@@ -2036,7 +2037,7 @@
           <p:cNvPr id="4" name="Marcador de número de diapositiva 3">
             <a:extLst>
               <a:ext uri="{FF2B5EF4-FFF2-40B4-BE49-F238E27FC236}">
-                <a16:creationId xmlns:a16="http://schemas.microsoft.com/office/drawing/2014/main" id="{A0E7AEDB-6D4A-F87F-6C64-BC9098E66B75}"/>
+                <a16:creationId xmlns:a16="http://schemas.microsoft.com/office/drawing/2014/main" id="{A8521D00-2B87-F178-35B0-EB69A8627FCB}"/>
               </a:ext>
             </a:extLst>
           </p:cNvPr>
@@ -2063,7 +2064,7 @@
     </p:spTree>
     <p:extLst>
       <p:ext uri="{BB962C8B-B14F-4D97-AF65-F5344CB8AC3E}">
-        <p14:creationId xmlns:p14="http://schemas.microsoft.com/office/powerpoint/2010/main" val="1679989881"/>
+        <p14:creationId xmlns:p14="http://schemas.microsoft.com/office/powerpoint/2010/main" val="3188953242"/>
       </p:ext>
     </p:extLst>
   </p:cSld>
@@ -2081,7 +2082,7 @@
         <p:cNvPr id="1" name="">
           <a:extLst>
             <a:ext uri="{FF2B5EF4-FFF2-40B4-BE49-F238E27FC236}">
-              <a16:creationId xmlns:a16="http://schemas.microsoft.com/office/drawing/2014/main" id="{DF68D2E6-0237-D873-7C3A-D798C24D8CBB}"/>
+              <a16:creationId xmlns:a16="http://schemas.microsoft.com/office/drawing/2014/main" id="{0CE64253-45B0-0878-F769-D4BC47DF32A6}"/>
             </a:ext>
           </a:extLst>
         </p:cNvPr>
@@ -2101,7 +2102,7 @@
           <p:cNvPr id="2" name="Marcador de imagen de diapositiva 1">
             <a:extLst>
               <a:ext uri="{FF2B5EF4-FFF2-40B4-BE49-F238E27FC236}">
-                <a16:creationId xmlns:a16="http://schemas.microsoft.com/office/drawing/2014/main" id="{2A1D92CB-0F7C-4C4E-97B1-B4EEEED4EDC3}"/>
+                <a16:creationId xmlns:a16="http://schemas.microsoft.com/office/drawing/2014/main" id="{30567242-2BAE-5509-9180-FB84F2EE1E53}"/>
               </a:ext>
             </a:extLst>
           </p:cNvPr>
@@ -2119,7 +2120,7 @@
           <p:cNvPr id="3" name="Marcador de notas 2">
             <a:extLst>
               <a:ext uri="{FF2B5EF4-FFF2-40B4-BE49-F238E27FC236}">
-                <a16:creationId xmlns:a16="http://schemas.microsoft.com/office/drawing/2014/main" id="{54C66880-7959-6B40-7145-D720E5070843}"/>
+                <a16:creationId xmlns:a16="http://schemas.microsoft.com/office/drawing/2014/main" id="{3CD76DAB-9DBA-A042-3F07-5B4296AEF42B}"/>
               </a:ext>
             </a:extLst>
           </p:cNvPr>
@@ -2144,7 +2145,7 @@
           <p:cNvPr id="4" name="Marcador de número de diapositiva 3">
             <a:extLst>
               <a:ext uri="{FF2B5EF4-FFF2-40B4-BE49-F238E27FC236}">
-                <a16:creationId xmlns:a16="http://schemas.microsoft.com/office/drawing/2014/main" id="{A8521D00-2B87-F178-35B0-EB69A8627FCB}"/>
+                <a16:creationId xmlns:a16="http://schemas.microsoft.com/office/drawing/2014/main" id="{5F21F7ED-C05F-BAD8-EE8C-C9D410B3E09A}"/>
               </a:ext>
             </a:extLst>
           </p:cNvPr>
@@ -2171,7 +2172,115 @@
     </p:spTree>
     <p:extLst>
       <p:ext uri="{BB962C8B-B14F-4D97-AF65-F5344CB8AC3E}">
-        <p14:creationId xmlns:p14="http://schemas.microsoft.com/office/powerpoint/2010/main" val="3188953242"/>
+        <p14:creationId xmlns:p14="http://schemas.microsoft.com/office/powerpoint/2010/main" val="3372929261"/>
+      </p:ext>
+    </p:extLst>
+  </p:cSld>
+  <p:clrMapOvr>
+    <a:masterClrMapping/>
+  </p:clrMapOvr>
+</p:notes>
+</file>
+
+<file path=ppt/notesSlides/notesSlide22.xml><?xml version="1.0" encoding="utf-8"?>
+<p:notes xmlns:a="http://schemas.openxmlformats.org/drawingml/2006/main" xmlns:r="http://schemas.openxmlformats.org/officeDocument/2006/relationships" xmlns:p="http://schemas.openxmlformats.org/presentationml/2006/main">
+  <p:cSld>
+    <p:spTree>
+      <p:nvGrpSpPr>
+        <p:cNvPr id="1" name="">
+          <a:extLst>
+            <a:ext uri="{FF2B5EF4-FFF2-40B4-BE49-F238E27FC236}">
+              <a16:creationId xmlns:a16="http://schemas.microsoft.com/office/drawing/2014/main" id="{593FEA56-BC14-5FA8-97A0-FB44222279FF}"/>
+            </a:ext>
+          </a:extLst>
+        </p:cNvPr>
+        <p:cNvGrpSpPr/>
+        <p:nvPr/>
+      </p:nvGrpSpPr>
+      <p:grpSpPr>
+        <a:xfrm>
+          <a:off x="0" y="0"/>
+          <a:ext cx="0" cy="0"/>
+          <a:chOff x="0" y="0"/>
+          <a:chExt cx="0" cy="0"/>
+        </a:xfrm>
+      </p:grpSpPr>
+      <p:sp>
+        <p:nvSpPr>
+          <p:cNvPr id="2" name="Marcador de imagen de diapositiva 1">
+            <a:extLst>
+              <a:ext uri="{FF2B5EF4-FFF2-40B4-BE49-F238E27FC236}">
+                <a16:creationId xmlns:a16="http://schemas.microsoft.com/office/drawing/2014/main" id="{26A26B9B-1789-4EA3-154C-58E5C835C0DD}"/>
+              </a:ext>
+            </a:extLst>
+          </p:cNvPr>
+          <p:cNvSpPr>
+            <a:spLocks noGrp="1" noRot="1" noChangeAspect="1"/>
+          </p:cNvSpPr>
+          <p:nvPr>
+            <p:ph type="sldImg"/>
+          </p:nvPr>
+        </p:nvSpPr>
+        <p:spPr/>
+      </p:sp>
+      <p:sp>
+        <p:nvSpPr>
+          <p:cNvPr id="3" name="Marcador de notas 2">
+            <a:extLst>
+              <a:ext uri="{FF2B5EF4-FFF2-40B4-BE49-F238E27FC236}">
+                <a16:creationId xmlns:a16="http://schemas.microsoft.com/office/drawing/2014/main" id="{9A4171A3-BF58-8FBE-62F6-01E3EA34B40F}"/>
+              </a:ext>
+            </a:extLst>
+          </p:cNvPr>
+          <p:cNvSpPr>
+            <a:spLocks noGrp="1"/>
+          </p:cNvSpPr>
+          <p:nvPr>
+            <p:ph type="body" idx="1"/>
+          </p:nvPr>
+        </p:nvSpPr>
+        <p:spPr/>
+        <p:txBody>
+          <a:bodyPr/>
+          <a:lstStyle/>
+          <a:p>
+            <a:endParaRPr lang="es-ES" dirty="0"/>
+          </a:p>
+        </p:txBody>
+      </p:sp>
+      <p:sp>
+        <p:nvSpPr>
+          <p:cNvPr id="4" name="Marcador de número de diapositiva 3">
+            <a:extLst>
+              <a:ext uri="{FF2B5EF4-FFF2-40B4-BE49-F238E27FC236}">
+                <a16:creationId xmlns:a16="http://schemas.microsoft.com/office/drawing/2014/main" id="{A0E7AEDB-6D4A-F87F-6C64-BC9098E66B75}"/>
+              </a:ext>
+            </a:extLst>
+          </p:cNvPr>
+          <p:cNvSpPr>
+            <a:spLocks noGrp="1"/>
+          </p:cNvSpPr>
+          <p:nvPr>
+            <p:ph type="sldNum" sz="quarter" idx="5"/>
+          </p:nvPr>
+        </p:nvSpPr>
+        <p:spPr/>
+        <p:txBody>
+          <a:bodyPr/>
+          <a:lstStyle/>
+          <a:p>
+            <a:fld id="{676223B9-C868-4436-87D9-1A3152E1157A}" type="slidenum">
+              <a:rPr lang="es-ES" smtClean="0"/>
+              <a:t>24</a:t>
+            </a:fld>
+            <a:endParaRPr lang="es-ES"/>
+          </a:p>
+        </p:txBody>
+      </p:sp>
+    </p:spTree>
+    <p:extLst>
+      <p:ext uri="{BB962C8B-B14F-4D97-AF65-F5344CB8AC3E}">
+        <p14:creationId xmlns:p14="http://schemas.microsoft.com/office/powerpoint/2010/main" val="1679989881"/>
       </p:ext>
     </p:extLst>
   </p:cSld>
@@ -10904,7 +11013,7 @@
         <p:cNvPr id="1" name="">
           <a:extLst>
             <a:ext uri="{FF2B5EF4-FFF2-40B4-BE49-F238E27FC236}">
-              <a16:creationId xmlns:a16="http://schemas.microsoft.com/office/drawing/2014/main" id="{D4294CAC-8D8D-647F-B282-B6C5DB58B463}"/>
+              <a16:creationId xmlns:a16="http://schemas.microsoft.com/office/drawing/2014/main" id="{CF068DDE-F222-3999-C17C-095C736851EC}"/>
             </a:ext>
           </a:extLst>
         </p:cNvPr>
@@ -10924,7 +11033,7 @@
           <p:cNvPr id="16" name="object 16">
             <a:extLst>
               <a:ext uri="{FF2B5EF4-FFF2-40B4-BE49-F238E27FC236}">
-                <a16:creationId xmlns:a16="http://schemas.microsoft.com/office/drawing/2014/main" id="{623A697C-3A37-BE77-865C-BA368B22BF24}"/>
+                <a16:creationId xmlns:a16="http://schemas.microsoft.com/office/drawing/2014/main" id="{CD869812-D9B2-5A84-8562-ECFC1D1A4D5E}"/>
               </a:ext>
             </a:extLst>
           </p:cNvPr>
@@ -10960,7 +11069,7 @@
             </a:pPr>
             <a:r>
               <a:rPr lang="en-US" sz="2500" dirty="0"/>
-              <a:t>Learning outcome #4 – Notebook section 4. Exercises – C3 Y C4</a:t>
+              <a:t>Learning outcome #4 – Notebook section 4. Exercises – C1</a:t>
             </a:r>
             <a:endParaRPr sz="2500" b="0" i="1" dirty="0">
               <a:latin typeface="+mj-lt"/>
@@ -10974,7 +11083,7 @@
           <p:cNvPr id="83" name="Gráfico 82">
             <a:extLst>
               <a:ext uri="{FF2B5EF4-FFF2-40B4-BE49-F238E27FC236}">
-                <a16:creationId xmlns:a16="http://schemas.microsoft.com/office/drawing/2014/main" id="{10043816-64F1-39B5-9ACD-09829D8999DB}"/>
+                <a16:creationId xmlns:a16="http://schemas.microsoft.com/office/drawing/2014/main" id="{F93FFD9B-A741-7206-969E-366A16B44D34}"/>
               </a:ext>
             </a:extLst>
           </p:cNvPr>
@@ -11010,7 +11119,7 @@
           <p:cNvPr id="84" name="Marcador de número de diapositiva 83">
             <a:extLst>
               <a:ext uri="{FF2B5EF4-FFF2-40B4-BE49-F238E27FC236}">
-                <a16:creationId xmlns:a16="http://schemas.microsoft.com/office/drawing/2014/main" id="{E80E427D-CC0F-3FFF-ADFC-5B85609C8006}"/>
+                <a16:creationId xmlns:a16="http://schemas.microsoft.com/office/drawing/2014/main" id="{3EF6064F-9B8C-A5FD-4A5D-32FA682CF189}"/>
               </a:ext>
             </a:extLst>
           </p:cNvPr>
@@ -11039,7 +11148,7 @@
           <p:cNvPr id="3" name="Marcador de pie de página 2">
             <a:extLst>
               <a:ext uri="{FF2B5EF4-FFF2-40B4-BE49-F238E27FC236}">
-                <a16:creationId xmlns:a16="http://schemas.microsoft.com/office/drawing/2014/main" id="{B118A8BE-E182-0D33-E94D-0D018691A0D3}"/>
+                <a16:creationId xmlns:a16="http://schemas.microsoft.com/office/drawing/2014/main" id="{4CDA4C53-DA67-756A-B23E-9EB89BA057B0}"/>
               </a:ext>
             </a:extLst>
           </p:cNvPr>
@@ -11073,7 +11182,7 @@
           <p:cNvPr id="2" name="CuadroTexto 1">
             <a:extLst>
               <a:ext uri="{FF2B5EF4-FFF2-40B4-BE49-F238E27FC236}">
-                <a16:creationId xmlns:a16="http://schemas.microsoft.com/office/drawing/2014/main" id="{0BCC2410-71CE-6971-F7F2-D53432A9CF8D}"/>
+                <a16:creationId xmlns:a16="http://schemas.microsoft.com/office/drawing/2014/main" id="{8F427ADD-586C-8E3C-027C-E53F85B691DE}"/>
               </a:ext>
             </a:extLst>
           </p:cNvPr>
@@ -11118,7 +11227,7 @@
           <p:cNvPr id="8" name="Rectángulo 7">
             <a:extLst>
               <a:ext uri="{FF2B5EF4-FFF2-40B4-BE49-F238E27FC236}">
-                <a16:creationId xmlns:a16="http://schemas.microsoft.com/office/drawing/2014/main" id="{E1B7279F-B1AF-1CAF-530A-3EDD064E04BD}"/>
+                <a16:creationId xmlns:a16="http://schemas.microsoft.com/office/drawing/2014/main" id="{25558197-4031-AB76-48D0-EF354B03A02F}"/>
               </a:ext>
             </a:extLst>
           </p:cNvPr>
@@ -11170,7 +11279,7 @@
           <p:cNvPr id="9" name="CuadroTexto 8">
             <a:extLst>
               <a:ext uri="{FF2B5EF4-FFF2-40B4-BE49-F238E27FC236}">
-                <a16:creationId xmlns:a16="http://schemas.microsoft.com/office/drawing/2014/main" id="{593AC565-A34A-C671-F4C2-C158CF2FDEC3}"/>
+                <a16:creationId xmlns:a16="http://schemas.microsoft.com/office/drawing/2014/main" id="{712541DC-5C4D-B9D7-C345-4FAD136A0636}"/>
               </a:ext>
             </a:extLst>
           </p:cNvPr>
@@ -11216,10 +11325,10 @@
       </p:sp>
       <p:pic>
         <p:nvPicPr>
-          <p:cNvPr id="19" name="Imagen 18">
-            <a:extLst>
-              <a:ext uri="{FF2B5EF4-FFF2-40B4-BE49-F238E27FC236}">
-                <a16:creationId xmlns:a16="http://schemas.microsoft.com/office/drawing/2014/main" id="{619167FD-D9BF-3A4A-4E23-651180884EC0}"/>
+          <p:cNvPr id="6" name="Imagen 5">
+            <a:extLst>
+              <a:ext uri="{FF2B5EF4-FFF2-40B4-BE49-F238E27FC236}">
+                <a16:creationId xmlns:a16="http://schemas.microsoft.com/office/drawing/2014/main" id="{1590284B-9F58-0625-4BB2-5B34AE61AEFF}"/>
               </a:ext>
             </a:extLst>
           </p:cNvPr>
@@ -11230,15 +11339,14 @@
         </p:nvPicPr>
         <p:blipFill>
           <a:blip r:embed="rId4"/>
-          <a:srcRect r="19078"/>
           <a:stretch>
             <a:fillRect/>
           </a:stretch>
         </p:blipFill>
         <p:spPr>
           <a:xfrm>
-            <a:off x="7527882" y="1436420"/>
-            <a:ext cx="4587918" cy="4279999"/>
+            <a:off x="7584233" y="1621836"/>
+            <a:ext cx="4607767" cy="3478413"/>
           </a:xfrm>
           <a:prstGeom prst="rect">
             <a:avLst/>
@@ -11247,10 +11355,10 @@
       </p:pic>
       <p:pic>
         <p:nvPicPr>
-          <p:cNvPr id="21" name="Imagen 20">
-            <a:extLst>
-              <a:ext uri="{FF2B5EF4-FFF2-40B4-BE49-F238E27FC236}">
-                <a16:creationId xmlns:a16="http://schemas.microsoft.com/office/drawing/2014/main" id="{5D717F6E-3365-7AF3-8625-14BDB710C750}"/>
+          <p:cNvPr id="11" name="Imagen 10">
+            <a:extLst>
+              <a:ext uri="{FF2B5EF4-FFF2-40B4-BE49-F238E27FC236}">
+                <a16:creationId xmlns:a16="http://schemas.microsoft.com/office/drawing/2014/main" id="{11B6205A-D25C-15A4-01B2-2BF755D8F8BC}"/>
               </a:ext>
             </a:extLst>
           </p:cNvPr>
@@ -11267,38 +11375,8 @@
         </p:blipFill>
         <p:spPr>
           <a:xfrm>
-            <a:off x="49763" y="1600200"/>
-            <a:ext cx="4105244" cy="3874613"/>
-          </a:xfrm>
-          <a:prstGeom prst="rect">
-            <a:avLst/>
-          </a:prstGeom>
-        </p:spPr>
-      </p:pic>
-      <p:pic>
-        <p:nvPicPr>
-          <p:cNvPr id="23" name="Imagen 22">
-            <a:extLst>
-              <a:ext uri="{FF2B5EF4-FFF2-40B4-BE49-F238E27FC236}">
-                <a16:creationId xmlns:a16="http://schemas.microsoft.com/office/drawing/2014/main" id="{07865B54-9CF2-1B42-A93A-9304C78B267C}"/>
-              </a:ext>
-            </a:extLst>
-          </p:cNvPr>
-          <p:cNvPicPr>
-            <a:picLocks noChangeAspect="1"/>
-          </p:cNvPicPr>
-          <p:nvPr/>
-        </p:nvPicPr>
-        <p:blipFill>
-          <a:blip r:embed="rId6"/>
-          <a:stretch>
-            <a:fillRect/>
-          </a:stretch>
-        </p:blipFill>
-        <p:spPr>
-          <a:xfrm>
-            <a:off x="4201069" y="2057400"/>
-            <a:ext cx="4043767" cy="3034485"/>
+            <a:off x="862975" y="2076232"/>
+            <a:ext cx="4979650" cy="2514600"/>
           </a:xfrm>
           <a:prstGeom prst="rect">
             <a:avLst/>
@@ -11308,7 +11386,7 @@
     </p:spTree>
     <p:extLst>
       <p:ext uri="{BB962C8B-B14F-4D97-AF65-F5344CB8AC3E}">
-        <p14:creationId xmlns:p14="http://schemas.microsoft.com/office/powerpoint/2010/main" val="593858753"/>
+        <p14:creationId xmlns:p14="http://schemas.microsoft.com/office/powerpoint/2010/main" val="2598156682"/>
       </p:ext>
     </p:extLst>
   </p:cSld>
@@ -11326,7 +11404,7 @@
         <p:cNvPr id="1" name="">
           <a:extLst>
             <a:ext uri="{FF2B5EF4-FFF2-40B4-BE49-F238E27FC236}">
-              <a16:creationId xmlns:a16="http://schemas.microsoft.com/office/drawing/2014/main" id="{CF068DDE-F222-3999-C17C-095C736851EC}"/>
+              <a16:creationId xmlns:a16="http://schemas.microsoft.com/office/drawing/2014/main" id="{C6286B76-E824-A886-7CA9-C3ADE55AF587}"/>
             </a:ext>
           </a:extLst>
         </p:cNvPr>
@@ -11346,7 +11424,7 @@
           <p:cNvPr id="16" name="object 16">
             <a:extLst>
               <a:ext uri="{FF2B5EF4-FFF2-40B4-BE49-F238E27FC236}">
-                <a16:creationId xmlns:a16="http://schemas.microsoft.com/office/drawing/2014/main" id="{CD869812-D9B2-5A84-8562-ECFC1D1A4D5E}"/>
+                <a16:creationId xmlns:a16="http://schemas.microsoft.com/office/drawing/2014/main" id="{A2036E7C-B414-90A6-C8C4-C07F44E07175}"/>
               </a:ext>
             </a:extLst>
           </p:cNvPr>
@@ -11382,7 +11460,7 @@
             </a:pPr>
             <a:r>
               <a:rPr lang="en-US" sz="2500" dirty="0"/>
-              <a:t>Learning outcome #4 – Notebook section 4. Exercises – C1</a:t>
+              <a:t>Learning outcome #4 – Notebook section 4. Exercises – C2</a:t>
             </a:r>
             <a:endParaRPr sz="2500" b="0" i="1" dirty="0">
               <a:latin typeface="+mj-lt"/>
@@ -11396,7 +11474,7 @@
           <p:cNvPr id="83" name="Gráfico 82">
             <a:extLst>
               <a:ext uri="{FF2B5EF4-FFF2-40B4-BE49-F238E27FC236}">
-                <a16:creationId xmlns:a16="http://schemas.microsoft.com/office/drawing/2014/main" id="{F93FFD9B-A741-7206-969E-366A16B44D34}"/>
+                <a16:creationId xmlns:a16="http://schemas.microsoft.com/office/drawing/2014/main" id="{972F98A9-7BDC-BCA6-B289-D14274017999}"/>
               </a:ext>
             </a:extLst>
           </p:cNvPr>
@@ -11432,7 +11510,7 @@
           <p:cNvPr id="84" name="Marcador de número de diapositiva 83">
             <a:extLst>
               <a:ext uri="{FF2B5EF4-FFF2-40B4-BE49-F238E27FC236}">
-                <a16:creationId xmlns:a16="http://schemas.microsoft.com/office/drawing/2014/main" id="{3EF6064F-9B8C-A5FD-4A5D-32FA682CF189}"/>
+                <a16:creationId xmlns:a16="http://schemas.microsoft.com/office/drawing/2014/main" id="{CC5F60C0-292E-8137-BF7A-C788DD20E44A}"/>
               </a:ext>
             </a:extLst>
           </p:cNvPr>
@@ -11461,7 +11539,7 @@
           <p:cNvPr id="3" name="Marcador de pie de página 2">
             <a:extLst>
               <a:ext uri="{FF2B5EF4-FFF2-40B4-BE49-F238E27FC236}">
-                <a16:creationId xmlns:a16="http://schemas.microsoft.com/office/drawing/2014/main" id="{4CDA4C53-DA67-756A-B23E-9EB89BA057B0}"/>
+                <a16:creationId xmlns:a16="http://schemas.microsoft.com/office/drawing/2014/main" id="{9B7971C2-66BE-783D-2D95-DFD739163B1F}"/>
               </a:ext>
             </a:extLst>
           </p:cNvPr>
@@ -11495,7 +11573,7 @@
           <p:cNvPr id="2" name="CuadroTexto 1">
             <a:extLst>
               <a:ext uri="{FF2B5EF4-FFF2-40B4-BE49-F238E27FC236}">
-                <a16:creationId xmlns:a16="http://schemas.microsoft.com/office/drawing/2014/main" id="{8F427ADD-586C-8E3C-027C-E53F85B691DE}"/>
+                <a16:creationId xmlns:a16="http://schemas.microsoft.com/office/drawing/2014/main" id="{AE0CEADD-0FAF-4ECE-15C6-F9AD2EFE5E34}"/>
               </a:ext>
             </a:extLst>
           </p:cNvPr>
@@ -11540,7 +11618,7 @@
           <p:cNvPr id="8" name="Rectángulo 7">
             <a:extLst>
               <a:ext uri="{FF2B5EF4-FFF2-40B4-BE49-F238E27FC236}">
-                <a16:creationId xmlns:a16="http://schemas.microsoft.com/office/drawing/2014/main" id="{25558197-4031-AB76-48D0-EF354B03A02F}"/>
+                <a16:creationId xmlns:a16="http://schemas.microsoft.com/office/drawing/2014/main" id="{A3DA45A9-E44C-4958-C586-DF7BC1DEEEA3}"/>
               </a:ext>
             </a:extLst>
           </p:cNvPr>
@@ -11592,7 +11670,7 @@
           <p:cNvPr id="9" name="CuadroTexto 8">
             <a:extLst>
               <a:ext uri="{FF2B5EF4-FFF2-40B4-BE49-F238E27FC236}">
-                <a16:creationId xmlns:a16="http://schemas.microsoft.com/office/drawing/2014/main" id="{712541DC-5C4D-B9D7-C345-4FAD136A0636}"/>
+                <a16:creationId xmlns:a16="http://schemas.microsoft.com/office/drawing/2014/main" id="{7C8C1B8D-FF8A-9AE8-9637-26700A9E932A}"/>
               </a:ext>
             </a:extLst>
           </p:cNvPr>
@@ -11638,10 +11716,10 @@
       </p:sp>
       <p:pic>
         <p:nvPicPr>
-          <p:cNvPr id="6" name="Imagen 5">
-            <a:extLst>
-              <a:ext uri="{FF2B5EF4-FFF2-40B4-BE49-F238E27FC236}">
-                <a16:creationId xmlns:a16="http://schemas.microsoft.com/office/drawing/2014/main" id="{1590284B-9F58-0625-4BB2-5B34AE61AEFF}"/>
+          <p:cNvPr id="5" name="Imagen 4">
+            <a:extLst>
+              <a:ext uri="{FF2B5EF4-FFF2-40B4-BE49-F238E27FC236}">
+                <a16:creationId xmlns:a16="http://schemas.microsoft.com/office/drawing/2014/main" id="{315E1F55-97F8-8406-0E92-54182690CE99}"/>
               </a:ext>
             </a:extLst>
           </p:cNvPr>
@@ -11658,8 +11736,8 @@
         </p:blipFill>
         <p:spPr>
           <a:xfrm>
-            <a:off x="7584233" y="1621836"/>
-            <a:ext cx="4607767" cy="3478413"/>
+            <a:off x="7326777" y="1409482"/>
+            <a:ext cx="5097483" cy="3848100"/>
           </a:xfrm>
           <a:prstGeom prst="rect">
             <a:avLst/>
@@ -11668,10 +11746,10 @@
       </p:pic>
       <p:pic>
         <p:nvPicPr>
-          <p:cNvPr id="11" name="Imagen 10">
-            <a:extLst>
-              <a:ext uri="{FF2B5EF4-FFF2-40B4-BE49-F238E27FC236}">
-                <a16:creationId xmlns:a16="http://schemas.microsoft.com/office/drawing/2014/main" id="{11B6205A-D25C-15A4-01B2-2BF755D8F8BC}"/>
+          <p:cNvPr id="10" name="Imagen 9">
+            <a:extLst>
+              <a:ext uri="{FF2B5EF4-FFF2-40B4-BE49-F238E27FC236}">
+                <a16:creationId xmlns:a16="http://schemas.microsoft.com/office/drawing/2014/main" id="{F4F60951-17F1-B0F9-A62F-D6ECA7B1B66F}"/>
               </a:ext>
             </a:extLst>
           </p:cNvPr>
@@ -11688,8 +11766,8 @@
         </p:blipFill>
         <p:spPr>
           <a:xfrm>
-            <a:off x="862975" y="2076232"/>
-            <a:ext cx="4979650" cy="2514600"/>
+            <a:off x="990600" y="1072293"/>
+            <a:ext cx="5255504" cy="4805746"/>
           </a:xfrm>
           <a:prstGeom prst="rect">
             <a:avLst/>
@@ -11699,7 +11777,7 @@
     </p:spTree>
     <p:extLst>
       <p:ext uri="{BB962C8B-B14F-4D97-AF65-F5344CB8AC3E}">
-        <p14:creationId xmlns:p14="http://schemas.microsoft.com/office/powerpoint/2010/main" val="2598156682"/>
+        <p14:creationId xmlns:p14="http://schemas.microsoft.com/office/powerpoint/2010/main" val="3702772284"/>
       </p:ext>
     </p:extLst>
   </p:cSld>
@@ -11710,6 +11788,428 @@
 </file>
 
 <file path=ppt/slides/slide24.xml><?xml version="1.0" encoding="utf-8"?>
+<p:sld xmlns:a="http://schemas.openxmlformats.org/drawingml/2006/main" xmlns:r="http://schemas.openxmlformats.org/officeDocument/2006/relationships" xmlns:p="http://schemas.openxmlformats.org/presentationml/2006/main">
+  <p:cSld>
+    <p:spTree>
+      <p:nvGrpSpPr>
+        <p:cNvPr id="1" name="">
+          <a:extLst>
+            <a:ext uri="{FF2B5EF4-FFF2-40B4-BE49-F238E27FC236}">
+              <a16:creationId xmlns:a16="http://schemas.microsoft.com/office/drawing/2014/main" id="{D4294CAC-8D8D-647F-B282-B6C5DB58B463}"/>
+            </a:ext>
+          </a:extLst>
+        </p:cNvPr>
+        <p:cNvGrpSpPr/>
+        <p:nvPr/>
+      </p:nvGrpSpPr>
+      <p:grpSpPr>
+        <a:xfrm>
+          <a:off x="0" y="0"/>
+          <a:ext cx="0" cy="0"/>
+          <a:chOff x="0" y="0"/>
+          <a:chExt cx="0" cy="0"/>
+        </a:xfrm>
+      </p:grpSpPr>
+      <p:sp>
+        <p:nvSpPr>
+          <p:cNvPr id="16" name="object 16">
+            <a:extLst>
+              <a:ext uri="{FF2B5EF4-FFF2-40B4-BE49-F238E27FC236}">
+                <a16:creationId xmlns:a16="http://schemas.microsoft.com/office/drawing/2014/main" id="{623A697C-3A37-BE77-865C-BA368B22BF24}"/>
+              </a:ext>
+            </a:extLst>
+          </p:cNvPr>
+          <p:cNvSpPr txBox="1">
+            <a:spLocks noGrp="1"/>
+          </p:cNvSpPr>
+          <p:nvPr>
+            <p:ph type="title"/>
+          </p:nvPr>
+        </p:nvSpPr>
+        <p:spPr>
+          <a:xfrm>
+            <a:off x="685800" y="408883"/>
+            <a:ext cx="10994410" cy="397545"/>
+          </a:xfrm>
+          <a:prstGeom prst="rect">
+            <a:avLst/>
+          </a:prstGeom>
+        </p:spPr>
+        <p:txBody>
+          <a:bodyPr vert="horz" wrap="square" lIns="0" tIns="12700" rIns="0" bIns="0" rtlCol="0">
+            <a:spAutoFit/>
+          </a:bodyPr>
+          <a:lstStyle/>
+          <a:p>
+            <a:pPr marL="12700" algn="l">
+              <a:lnSpc>
+                <a:spcPct val="100000"/>
+              </a:lnSpc>
+              <a:spcBef>
+                <a:spcPts val="100"/>
+              </a:spcBef>
+            </a:pPr>
+            <a:r>
+              <a:rPr lang="en-US" sz="2500" dirty="0"/>
+              <a:t>Learning outcome #4 – Notebook section 4. Exercises – C3 Y C4</a:t>
+            </a:r>
+            <a:endParaRPr sz="2500" b="0" i="1" dirty="0">
+              <a:latin typeface="+mj-lt"/>
+              <a:cs typeface="Lucida Sans"/>
+            </a:endParaRPr>
+          </a:p>
+        </p:txBody>
+      </p:sp>
+      <p:pic>
+        <p:nvPicPr>
+          <p:cNvPr id="83" name="Gráfico 82">
+            <a:extLst>
+              <a:ext uri="{FF2B5EF4-FFF2-40B4-BE49-F238E27FC236}">
+                <a16:creationId xmlns:a16="http://schemas.microsoft.com/office/drawing/2014/main" id="{10043816-64F1-39B5-9ACD-09829D8999DB}"/>
+              </a:ext>
+            </a:extLst>
+          </p:cNvPr>
+          <p:cNvPicPr>
+            <a:picLocks noChangeAspect="1"/>
+          </p:cNvPicPr>
+          <p:nvPr/>
+        </p:nvPicPr>
+        <p:blipFill>
+          <a:blip>
+            <a:extLst>
+              <a:ext uri="{96DAC541-7B7A-43D3-8B79-37D633B846F1}">
+                <asvg:svgBlip xmlns:asvg="http://schemas.microsoft.com/office/drawing/2016/SVG/main" r:embed="rId3"/>
+              </a:ext>
+            </a:extLst>
+          </a:blip>
+          <a:stretch>
+            <a:fillRect/>
+          </a:stretch>
+        </p:blipFill>
+        <p:spPr>
+          <a:xfrm>
+            <a:off x="5045006" y="6356057"/>
+            <a:ext cx="6409575" cy="363174"/>
+          </a:xfrm>
+          <a:prstGeom prst="rect">
+            <a:avLst/>
+          </a:prstGeom>
+        </p:spPr>
+      </p:pic>
+      <p:sp>
+        <p:nvSpPr>
+          <p:cNvPr id="84" name="Marcador de número de diapositiva 83">
+            <a:extLst>
+              <a:ext uri="{FF2B5EF4-FFF2-40B4-BE49-F238E27FC236}">
+                <a16:creationId xmlns:a16="http://schemas.microsoft.com/office/drawing/2014/main" id="{E80E427D-CC0F-3FFF-ADFC-5B85609C8006}"/>
+              </a:ext>
+            </a:extLst>
+          </p:cNvPr>
+          <p:cNvSpPr>
+            <a:spLocks noGrp="1"/>
+          </p:cNvSpPr>
+          <p:nvPr>
+            <p:ph type="sldNum" sz="quarter" idx="7"/>
+          </p:nvPr>
+        </p:nvSpPr>
+        <p:spPr/>
+        <p:txBody>
+          <a:bodyPr/>
+          <a:lstStyle/>
+          <a:p>
+            <a:fld id="{B6F15528-21DE-4FAA-801E-634DDDAF4B2B}" type="slidenum">
+              <a:rPr lang="es-ES" smtClean="0"/>
+              <a:t>24</a:t>
+            </a:fld>
+            <a:endParaRPr lang="es-ES"/>
+          </a:p>
+        </p:txBody>
+      </p:sp>
+      <p:sp>
+        <p:nvSpPr>
+          <p:cNvPr id="3" name="Marcador de pie de página 2">
+            <a:extLst>
+              <a:ext uri="{FF2B5EF4-FFF2-40B4-BE49-F238E27FC236}">
+                <a16:creationId xmlns:a16="http://schemas.microsoft.com/office/drawing/2014/main" id="{B118A8BE-E182-0D33-E94D-0D018691A0D3}"/>
+              </a:ext>
+            </a:extLst>
+          </p:cNvPr>
+          <p:cNvSpPr>
+            <a:spLocks noGrp="1"/>
+          </p:cNvSpPr>
+          <p:nvPr>
+            <p:ph type="ftr" sz="quarter" idx="5"/>
+          </p:nvPr>
+        </p:nvSpPr>
+        <p:spPr/>
+        <p:txBody>
+          <a:bodyPr/>
+          <a:lstStyle/>
+          <a:p>
+            <a:pPr marL="12700">
+              <a:spcBef>
+                <a:spcPts val="15"/>
+              </a:spcBef>
+            </a:pPr>
+            <a:r>
+              <a:rPr lang="es-ES" spc="-5"/>
+              <a:t>LAB 4.0. LAYOUT</a:t>
+            </a:r>
+            <a:endParaRPr lang="es-ES" spc="-5" dirty="0"/>
+          </a:p>
+        </p:txBody>
+      </p:sp>
+      <p:sp>
+        <p:nvSpPr>
+          <p:cNvPr id="2" name="CuadroTexto 1">
+            <a:extLst>
+              <a:ext uri="{FF2B5EF4-FFF2-40B4-BE49-F238E27FC236}">
+                <a16:creationId xmlns:a16="http://schemas.microsoft.com/office/drawing/2014/main" id="{0BCC2410-71CE-6971-F7F2-D53432A9CF8D}"/>
+              </a:ext>
+            </a:extLst>
+          </p:cNvPr>
+          <p:cNvSpPr txBox="1"/>
+          <p:nvPr/>
+        </p:nvSpPr>
+        <p:spPr>
+          <a:xfrm>
+            <a:off x="228601" y="990600"/>
+            <a:ext cx="7282766" cy="5181600"/>
+          </a:xfrm>
+          <a:prstGeom prst="rect">
+            <a:avLst/>
+          </a:prstGeom>
+          <a:solidFill>
+            <a:schemeClr val="bg1">
+              <a:lumMod val="95000"/>
+            </a:schemeClr>
+          </a:solidFill>
+          <a:ln w="28575">
+            <a:solidFill>
+              <a:srgbClr val="E0700D"/>
+            </a:solidFill>
+          </a:ln>
+        </p:spPr>
+        <p:txBody>
+          <a:bodyPr wrap="square" rtlCol="0">
+            <a:noAutofit/>
+          </a:bodyPr>
+          <a:lstStyle/>
+          <a:p>
+            <a:pPr algn="just"/>
+            <a:endParaRPr lang="en-US" sz="1200" dirty="0">
+              <a:latin typeface="Arial" panose="020B0604020202020204" pitchFamily="34" charset="0"/>
+              <a:cs typeface="Arial" panose="020B0604020202020204" pitchFamily="34" charset="0"/>
+            </a:endParaRPr>
+          </a:p>
+        </p:txBody>
+      </p:sp>
+      <p:sp>
+        <p:nvSpPr>
+          <p:cNvPr id="8" name="Rectángulo 7">
+            <a:extLst>
+              <a:ext uri="{FF2B5EF4-FFF2-40B4-BE49-F238E27FC236}">
+                <a16:creationId xmlns:a16="http://schemas.microsoft.com/office/drawing/2014/main" id="{E1B7279F-B1AF-1CAF-530A-3EDD064E04BD}"/>
+              </a:ext>
+            </a:extLst>
+          </p:cNvPr>
+          <p:cNvSpPr/>
+          <p:nvPr/>
+        </p:nvSpPr>
+        <p:spPr>
+          <a:xfrm>
+            <a:off x="7620000" y="985620"/>
+            <a:ext cx="4511039" cy="5181600"/>
+          </a:xfrm>
+          <a:prstGeom prst="rect">
+            <a:avLst/>
+          </a:prstGeom>
+          <a:noFill/>
+          <a:ln w="28575">
+            <a:solidFill>
+              <a:srgbClr val="E0700D"/>
+            </a:solidFill>
+          </a:ln>
+        </p:spPr>
+        <p:style>
+          <a:lnRef idx="2">
+            <a:schemeClr val="accent1">
+              <a:shade val="15000"/>
+            </a:schemeClr>
+          </a:lnRef>
+          <a:fillRef idx="1">
+            <a:schemeClr val="accent1"/>
+          </a:fillRef>
+          <a:effectRef idx="0">
+            <a:schemeClr val="accent1"/>
+          </a:effectRef>
+          <a:fontRef idx="minor">
+            <a:schemeClr val="lt1"/>
+          </a:fontRef>
+        </p:style>
+        <p:txBody>
+          <a:bodyPr rtlCol="0" anchor="ctr"/>
+          <a:lstStyle/>
+          <a:p>
+            <a:pPr algn="ctr"/>
+            <a:endParaRPr lang="en-US"/>
+          </a:p>
+        </p:txBody>
+      </p:sp>
+      <p:sp>
+        <p:nvSpPr>
+          <p:cNvPr id="9" name="CuadroTexto 8">
+            <a:extLst>
+              <a:ext uri="{FF2B5EF4-FFF2-40B4-BE49-F238E27FC236}">
+                <a16:creationId xmlns:a16="http://schemas.microsoft.com/office/drawing/2014/main" id="{593AC565-A34A-C671-F4C2-C158CF2FDEC3}"/>
+              </a:ext>
+            </a:extLst>
+          </p:cNvPr>
+          <p:cNvSpPr txBox="1"/>
+          <p:nvPr/>
+        </p:nvSpPr>
+        <p:spPr>
+          <a:xfrm>
+            <a:off x="8180318" y="3105834"/>
+            <a:ext cx="1774973" cy="369332"/>
+          </a:xfrm>
+          <a:prstGeom prst="rect">
+            <a:avLst/>
+          </a:prstGeom>
+          <a:noFill/>
+        </p:spPr>
+        <p:txBody>
+          <a:bodyPr wrap="none" rtlCol="0">
+            <a:spAutoFit/>
+          </a:bodyPr>
+          <a:lstStyle/>
+          <a:p>
+            <a:pPr algn="ctr"/>
+            <a:r>
+              <a:rPr lang="es-ES" dirty="0" err="1"/>
+              <a:t>Screenshot</a:t>
+            </a:r>
+            <a:r>
+              <a:rPr lang="es-ES" dirty="0"/>
+              <a:t> </a:t>
+            </a:r>
+            <a:r>
+              <a:rPr lang="es-ES" dirty="0" err="1"/>
+              <a:t>for</a:t>
+            </a:r>
+            <a:r>
+              <a:rPr lang="es-ES" dirty="0"/>
+              <a:t> …</a:t>
+            </a:r>
+            <a:endParaRPr lang="en-US" dirty="0"/>
+          </a:p>
+        </p:txBody>
+      </p:sp>
+      <p:pic>
+        <p:nvPicPr>
+          <p:cNvPr id="19" name="Imagen 18">
+            <a:extLst>
+              <a:ext uri="{FF2B5EF4-FFF2-40B4-BE49-F238E27FC236}">
+                <a16:creationId xmlns:a16="http://schemas.microsoft.com/office/drawing/2014/main" id="{619167FD-D9BF-3A4A-4E23-651180884EC0}"/>
+              </a:ext>
+            </a:extLst>
+          </p:cNvPr>
+          <p:cNvPicPr>
+            <a:picLocks noChangeAspect="1"/>
+          </p:cNvPicPr>
+          <p:nvPr/>
+        </p:nvPicPr>
+        <p:blipFill>
+          <a:blip r:embed="rId4"/>
+          <a:srcRect r="19078"/>
+          <a:stretch>
+            <a:fillRect/>
+          </a:stretch>
+        </p:blipFill>
+        <p:spPr>
+          <a:xfrm>
+            <a:off x="7527882" y="1436420"/>
+            <a:ext cx="4587918" cy="4279999"/>
+          </a:xfrm>
+          <a:prstGeom prst="rect">
+            <a:avLst/>
+          </a:prstGeom>
+        </p:spPr>
+      </p:pic>
+      <p:pic>
+        <p:nvPicPr>
+          <p:cNvPr id="21" name="Imagen 20">
+            <a:extLst>
+              <a:ext uri="{FF2B5EF4-FFF2-40B4-BE49-F238E27FC236}">
+                <a16:creationId xmlns:a16="http://schemas.microsoft.com/office/drawing/2014/main" id="{5D717F6E-3365-7AF3-8625-14BDB710C750}"/>
+              </a:ext>
+            </a:extLst>
+          </p:cNvPr>
+          <p:cNvPicPr>
+            <a:picLocks noChangeAspect="1"/>
+          </p:cNvPicPr>
+          <p:nvPr/>
+        </p:nvPicPr>
+        <p:blipFill>
+          <a:blip r:embed="rId5"/>
+          <a:stretch>
+            <a:fillRect/>
+          </a:stretch>
+        </p:blipFill>
+        <p:spPr>
+          <a:xfrm>
+            <a:off x="49763" y="1600200"/>
+            <a:ext cx="4105244" cy="3874613"/>
+          </a:xfrm>
+          <a:prstGeom prst="rect">
+            <a:avLst/>
+          </a:prstGeom>
+        </p:spPr>
+      </p:pic>
+      <p:pic>
+        <p:nvPicPr>
+          <p:cNvPr id="23" name="Imagen 22">
+            <a:extLst>
+              <a:ext uri="{FF2B5EF4-FFF2-40B4-BE49-F238E27FC236}">
+                <a16:creationId xmlns:a16="http://schemas.microsoft.com/office/drawing/2014/main" id="{07865B54-9CF2-1B42-A93A-9304C78B267C}"/>
+              </a:ext>
+            </a:extLst>
+          </p:cNvPr>
+          <p:cNvPicPr>
+            <a:picLocks noChangeAspect="1"/>
+          </p:cNvPicPr>
+          <p:nvPr/>
+        </p:nvPicPr>
+        <p:blipFill>
+          <a:blip r:embed="rId6"/>
+          <a:stretch>
+            <a:fillRect/>
+          </a:stretch>
+        </p:blipFill>
+        <p:spPr>
+          <a:xfrm>
+            <a:off x="4201069" y="2057400"/>
+            <a:ext cx="4043767" cy="3034485"/>
+          </a:xfrm>
+          <a:prstGeom prst="rect">
+            <a:avLst/>
+          </a:prstGeom>
+        </p:spPr>
+      </p:pic>
+    </p:spTree>
+    <p:extLst>
+      <p:ext uri="{BB962C8B-B14F-4D97-AF65-F5344CB8AC3E}">
+        <p14:creationId xmlns:p14="http://schemas.microsoft.com/office/powerpoint/2010/main" val="593858753"/>
+      </p:ext>
+    </p:extLst>
+  </p:cSld>
+  <p:clrMapOvr>
+    <a:masterClrMapping/>
+  </p:clrMapOvr>
+</p:sld>
+</file>
+
+<file path=ppt/slides/slide25.xml><?xml version="1.0" encoding="utf-8"?>
 <p:sld xmlns:a="http://schemas.openxmlformats.org/drawingml/2006/main" xmlns:r="http://schemas.openxmlformats.org/officeDocument/2006/relationships" xmlns:p="http://schemas.openxmlformats.org/presentationml/2006/main">
   <p:cSld>
     <p:spTree>
@@ -11848,7 +12348,7 @@
           <a:p>
             <a:fld id="{B6F15528-21DE-4FAA-801E-634DDDAF4B2B}" type="slidenum">
               <a:rPr lang="es-ES" smtClean="0"/>
-              <a:t>24</a:t>
+              <a:t>25</a:t>
             </a:fld>
             <a:endParaRPr lang="es-ES"/>
           </a:p>
